--- a/docs/pptx/carbo/ritu-carbo-linsubhr-dosedisc-death.pptx
+++ b/docs/pptx/carbo/ritu-carbo-linsubhr-dosedisc-death.pptx
@@ -2443,7 +2443,7 @@
           </p:nvSpPr>
           <p:spPr>
             <a:xfrm>
-              <a:off x="909675" y="1896563"/>
+              <a:off x="911833" y="1896563"/>
               <a:ext cx="0" cy="3826579"/>
             </a:xfrm>
             <a:custGeom>
@@ -2486,7 +2486,7 @@
           </p:nvSpPr>
           <p:spPr>
             <a:xfrm>
-              <a:off x="3323794" y="1896563"/>
+              <a:off x="3322810" y="1896563"/>
               <a:ext cx="0" cy="3826579"/>
             </a:xfrm>
             <a:custGeom>
@@ -2529,7 +2529,7 @@
           </p:nvSpPr>
           <p:spPr>
             <a:xfrm>
-              <a:off x="5737913" y="1896563"/>
+              <a:off x="5733788" y="1896563"/>
               <a:ext cx="0" cy="3826579"/>
             </a:xfrm>
             <a:custGeom>
@@ -2572,7 +2572,7 @@
           </p:nvSpPr>
           <p:spPr>
             <a:xfrm>
-              <a:off x="8152032" y="1896563"/>
+              <a:off x="8144765" y="1896563"/>
               <a:ext cx="0" cy="3826579"/>
             </a:xfrm>
             <a:custGeom>
@@ -2830,7 +2830,7 @@
           </p:nvSpPr>
           <p:spPr>
             <a:xfrm>
-              <a:off x="2116734" y="1896563"/>
+              <a:off x="2117321" y="1896563"/>
               <a:ext cx="0" cy="3826579"/>
             </a:xfrm>
             <a:custGeom>
@@ -2873,7 +2873,7 @@
           </p:nvSpPr>
           <p:spPr>
             <a:xfrm>
-              <a:off x="4530853" y="1896563"/>
+              <a:off x="4528299" y="1896563"/>
               <a:ext cx="0" cy="3826579"/>
             </a:xfrm>
             <a:custGeom>
@@ -2916,7 +2916,7 @@
           </p:nvSpPr>
           <p:spPr>
             <a:xfrm>
-              <a:off x="6944973" y="1896563"/>
+              <a:off x="6939276" y="1896563"/>
               <a:ext cx="0" cy="3826579"/>
             </a:xfrm>
             <a:custGeom>
@@ -4241,191 +4241,182 @@
           <p:spPr>
             <a:xfrm>
               <a:off x="1172049" y="1896563"/>
-              <a:ext cx="4213588" cy="3647760"/>
+              <a:ext cx="3948967" cy="3651981"/>
             </a:xfrm>
             <a:custGeom>
               <a:avLst/>
               <a:pathLst>
-                <a:path w="4213588" h="3647760">
+                <a:path w="3948967" h="3651981">
                   <a:moveTo>
-                    <a:pt x="0" y="3647760"/>
+                    <a:pt x="0" y="3651981"/>
                   </a:moveTo>
                   <a:lnTo>
-                    <a:pt x="71622" y="3647179"/>
-                  </a:lnTo>
-                  <a:lnTo>
-                    <a:pt x="143245" y="3646528"/>
-                  </a:lnTo>
-                  <a:lnTo>
-                    <a:pt x="214867" y="3645801"/>
-                  </a:lnTo>
-                  <a:lnTo>
-                    <a:pt x="286490" y="3644986"/>
-                  </a:lnTo>
-                  <a:lnTo>
-                    <a:pt x="358112" y="3644075"/>
-                  </a:lnTo>
-                  <a:lnTo>
-                    <a:pt x="429735" y="3643055"/>
-                  </a:lnTo>
-                  <a:lnTo>
-                    <a:pt x="501357" y="3641913"/>
-                  </a:lnTo>
-                  <a:lnTo>
-                    <a:pt x="572980" y="3640636"/>
-                  </a:lnTo>
-                  <a:lnTo>
-                    <a:pt x="644602" y="3639207"/>
-                  </a:lnTo>
-                  <a:lnTo>
-                    <a:pt x="716225" y="3637607"/>
-                  </a:lnTo>
-                  <a:lnTo>
-                    <a:pt x="787847" y="3635817"/>
-                  </a:lnTo>
-                  <a:lnTo>
-                    <a:pt x="859470" y="3633814"/>
-                  </a:lnTo>
-                  <a:lnTo>
-                    <a:pt x="931092" y="3631573"/>
-                  </a:lnTo>
-                  <a:lnTo>
-                    <a:pt x="1002715" y="3629065"/>
-                  </a:lnTo>
-                  <a:lnTo>
-                    <a:pt x="1074337" y="3626258"/>
-                  </a:lnTo>
-                  <a:lnTo>
-                    <a:pt x="1145960" y="3623117"/>
-                  </a:lnTo>
-                  <a:lnTo>
-                    <a:pt x="1217582" y="3619603"/>
-                  </a:lnTo>
-                  <a:lnTo>
-                    <a:pt x="1289205" y="3615670"/>
-                  </a:lnTo>
-                  <a:lnTo>
-                    <a:pt x="1360827" y="3611268"/>
-                  </a:lnTo>
-                  <a:lnTo>
-                    <a:pt x="1432450" y="3606343"/>
-                  </a:lnTo>
-                  <a:lnTo>
-                    <a:pt x="1504073" y="3600832"/>
-                  </a:lnTo>
-                  <a:lnTo>
-                    <a:pt x="1575695" y="3594664"/>
-                  </a:lnTo>
-                  <a:lnTo>
-                    <a:pt x="1647318" y="3587763"/>
-                  </a:lnTo>
-                  <a:lnTo>
-                    <a:pt x="1718940" y="3580040"/>
-                  </a:lnTo>
-                  <a:lnTo>
-                    <a:pt x="1790563" y="3571397"/>
-                  </a:lnTo>
-                  <a:lnTo>
-                    <a:pt x="1862185" y="3561726"/>
-                  </a:lnTo>
-                  <a:lnTo>
-                    <a:pt x="1933808" y="3550903"/>
-                  </a:lnTo>
-                  <a:lnTo>
-                    <a:pt x="2005430" y="3538793"/>
-                  </a:lnTo>
-                  <a:lnTo>
-                    <a:pt x="2077053" y="3525240"/>
-                  </a:lnTo>
-                  <a:lnTo>
-                    <a:pt x="2148675" y="3510074"/>
-                  </a:lnTo>
-                  <a:lnTo>
-                    <a:pt x="2220298" y="3493104"/>
-                  </a:lnTo>
-                  <a:lnTo>
-                    <a:pt x="2291920" y="3474112"/>
-                  </a:lnTo>
-                  <a:lnTo>
-                    <a:pt x="2363543" y="3452861"/>
-                  </a:lnTo>
-                  <a:lnTo>
-                    <a:pt x="2435165" y="3429079"/>
-                  </a:lnTo>
-                  <a:lnTo>
-                    <a:pt x="2506788" y="3402467"/>
-                  </a:lnTo>
-                  <a:lnTo>
-                    <a:pt x="2578410" y="3372687"/>
-                  </a:lnTo>
-                  <a:lnTo>
-                    <a:pt x="2650033" y="3339362"/>
-                  </a:lnTo>
-                  <a:lnTo>
-                    <a:pt x="2721655" y="3302070"/>
-                  </a:lnTo>
-                  <a:lnTo>
-                    <a:pt x="2793278" y="3260339"/>
-                  </a:lnTo>
-                  <a:lnTo>
-                    <a:pt x="2864901" y="3213640"/>
-                  </a:lnTo>
-                  <a:lnTo>
-                    <a:pt x="2936523" y="3161383"/>
-                  </a:lnTo>
-                  <a:lnTo>
-                    <a:pt x="3008146" y="3102904"/>
-                  </a:lnTo>
-                  <a:lnTo>
-                    <a:pt x="3079768" y="3037465"/>
-                  </a:lnTo>
-                  <a:lnTo>
-                    <a:pt x="3151391" y="2964237"/>
-                  </a:lnTo>
-                  <a:lnTo>
-                    <a:pt x="3223013" y="2882291"/>
-                  </a:lnTo>
-                  <a:lnTo>
-                    <a:pt x="3294636" y="2790591"/>
-                  </a:lnTo>
-                  <a:lnTo>
-                    <a:pt x="3366258" y="2687975"/>
-                  </a:lnTo>
-                  <a:lnTo>
-                    <a:pt x="3437881" y="2573144"/>
-                  </a:lnTo>
-                  <a:lnTo>
-                    <a:pt x="3509503" y="2444644"/>
-                  </a:lnTo>
-                  <a:lnTo>
-                    <a:pt x="3581126" y="2300848"/>
-                  </a:lnTo>
-                  <a:lnTo>
-                    <a:pt x="3652748" y="2139934"/>
-                  </a:lnTo>
-                  <a:lnTo>
-                    <a:pt x="3724371" y="1959867"/>
-                  </a:lnTo>
-                  <a:lnTo>
-                    <a:pt x="3795993" y="1758364"/>
-                  </a:lnTo>
-                  <a:lnTo>
-                    <a:pt x="3867616" y="1532875"/>
-                  </a:lnTo>
-                  <a:lnTo>
-                    <a:pt x="3939238" y="1280545"/>
-                  </a:lnTo>
-                  <a:lnTo>
-                    <a:pt x="4010861" y="998178"/>
-                  </a:lnTo>
-                  <a:lnTo>
-                    <a:pt x="4082483" y="682200"/>
-                  </a:lnTo>
-                  <a:lnTo>
-                    <a:pt x="4154106" y="328608"/>
-                  </a:lnTo>
-                  <a:lnTo>
-                    <a:pt x="4213588" y="0"/>
+                    <a:pt x="71622" y="3651869"/>
+                  </a:lnTo>
+                  <a:lnTo>
+                    <a:pt x="143245" y="3651739"/>
+                  </a:lnTo>
+                  <a:lnTo>
+                    <a:pt x="214867" y="3651586"/>
+                  </a:lnTo>
+                  <a:lnTo>
+                    <a:pt x="286490" y="3651407"/>
+                  </a:lnTo>
+                  <a:lnTo>
+                    <a:pt x="358112" y="3651198"/>
+                  </a:lnTo>
+                  <a:lnTo>
+                    <a:pt x="429735" y="3650953"/>
+                  </a:lnTo>
+                  <a:lnTo>
+                    <a:pt x="501357" y="3650667"/>
+                  </a:lnTo>
+                  <a:lnTo>
+                    <a:pt x="572980" y="3650333"/>
+                  </a:lnTo>
+                  <a:lnTo>
+                    <a:pt x="644602" y="3649942"/>
+                  </a:lnTo>
+                  <a:lnTo>
+                    <a:pt x="716225" y="3649486"/>
+                  </a:lnTo>
+                  <a:lnTo>
+                    <a:pt x="787847" y="3648952"/>
+                  </a:lnTo>
+                  <a:lnTo>
+                    <a:pt x="859470" y="3648327"/>
+                  </a:lnTo>
+                  <a:lnTo>
+                    <a:pt x="931092" y="3647598"/>
+                  </a:lnTo>
+                  <a:lnTo>
+                    <a:pt x="1002715" y="3646744"/>
+                  </a:lnTo>
+                  <a:lnTo>
+                    <a:pt x="1074337" y="3645747"/>
+                  </a:lnTo>
+                  <a:lnTo>
+                    <a:pt x="1145960" y="3644581"/>
+                  </a:lnTo>
+                  <a:lnTo>
+                    <a:pt x="1217582" y="3643217"/>
+                  </a:lnTo>
+                  <a:lnTo>
+                    <a:pt x="1289205" y="3641623"/>
+                  </a:lnTo>
+                  <a:lnTo>
+                    <a:pt x="1360827" y="3639760"/>
+                  </a:lnTo>
+                  <a:lnTo>
+                    <a:pt x="1432450" y="3637581"/>
+                  </a:lnTo>
+                  <a:lnTo>
+                    <a:pt x="1504073" y="3635034"/>
+                  </a:lnTo>
+                  <a:lnTo>
+                    <a:pt x="1575695" y="3632056"/>
+                  </a:lnTo>
+                  <a:lnTo>
+                    <a:pt x="1647318" y="3628575"/>
+                  </a:lnTo>
+                  <a:lnTo>
+                    <a:pt x="1718940" y="3624505"/>
+                  </a:lnTo>
+                  <a:lnTo>
+                    <a:pt x="1790563" y="3619746"/>
+                  </a:lnTo>
+                  <a:lnTo>
+                    <a:pt x="1862185" y="3614183"/>
+                  </a:lnTo>
+                  <a:lnTo>
+                    <a:pt x="1933808" y="3607679"/>
+                  </a:lnTo>
+                  <a:lnTo>
+                    <a:pt x="2005430" y="3600076"/>
+                  </a:lnTo>
+                  <a:lnTo>
+                    <a:pt x="2077053" y="3591187"/>
+                  </a:lnTo>
+                  <a:lnTo>
+                    <a:pt x="2148675" y="3580794"/>
+                  </a:lnTo>
+                  <a:lnTo>
+                    <a:pt x="2220298" y="3568644"/>
+                  </a:lnTo>
+                  <a:lnTo>
+                    <a:pt x="2291920" y="3554440"/>
+                  </a:lnTo>
+                  <a:lnTo>
+                    <a:pt x="2363543" y="3537833"/>
+                  </a:lnTo>
+                  <a:lnTo>
+                    <a:pt x="2435165" y="3518418"/>
+                  </a:lnTo>
+                  <a:lnTo>
+                    <a:pt x="2506788" y="3495720"/>
+                  </a:lnTo>
+                  <a:lnTo>
+                    <a:pt x="2578410" y="3469184"/>
+                  </a:lnTo>
+                  <a:lnTo>
+                    <a:pt x="2650033" y="3438160"/>
+                  </a:lnTo>
+                  <a:lnTo>
+                    <a:pt x="2721655" y="3401891"/>
+                  </a:lnTo>
+                  <a:lnTo>
+                    <a:pt x="2793278" y="3359488"/>
+                  </a:lnTo>
+                  <a:lnTo>
+                    <a:pt x="2864901" y="3309914"/>
+                  </a:lnTo>
+                  <a:lnTo>
+                    <a:pt x="2936523" y="3251957"/>
+                  </a:lnTo>
+                  <a:lnTo>
+                    <a:pt x="3008146" y="3184200"/>
+                  </a:lnTo>
+                  <a:lnTo>
+                    <a:pt x="3079768" y="3104985"/>
+                  </a:lnTo>
+                  <a:lnTo>
+                    <a:pt x="3151391" y="3012374"/>
+                  </a:lnTo>
+                  <a:lnTo>
+                    <a:pt x="3223013" y="2904102"/>
+                  </a:lnTo>
+                  <a:lnTo>
+                    <a:pt x="3294636" y="2777521"/>
+                  </a:lnTo>
+                  <a:lnTo>
+                    <a:pt x="3366258" y="2629535"/>
+                  </a:lnTo>
+                  <a:lnTo>
+                    <a:pt x="3437881" y="2456524"/>
+                  </a:lnTo>
+                  <a:lnTo>
+                    <a:pt x="3509503" y="2254256"/>
+                  </a:lnTo>
+                  <a:lnTo>
+                    <a:pt x="3581126" y="2017784"/>
+                  </a:lnTo>
+                  <a:lnTo>
+                    <a:pt x="3652748" y="1741324"/>
+                  </a:lnTo>
+                  <a:lnTo>
+                    <a:pt x="3724371" y="1418113"/>
+                  </a:lnTo>
+                  <a:lnTo>
+                    <a:pt x="3795993" y="1040246"/>
+                  </a:lnTo>
+                  <a:lnTo>
+                    <a:pt x="3867616" y="598481"/>
+                  </a:lnTo>
+                  <a:lnTo>
+                    <a:pt x="3939238" y="82012"/>
+                  </a:lnTo>
+                  <a:lnTo>
+                    <a:pt x="3948967" y="0"/>
                   </a:lnTo>
                 </a:path>
               </a:pathLst>
@@ -4497,7 +4488,7 @@
           </p:nvSpPr>
           <p:spPr>
             <a:xfrm>
-              <a:off x="4472293" y="1896563"/>
+              <a:off x="4463824" y="1896563"/>
               <a:ext cx="0" cy="3826579"/>
             </a:xfrm>
             <a:custGeom>
@@ -4770,7 +4761,7 @@
           </p:nvSpPr>
           <p:spPr>
             <a:xfrm>
-              <a:off x="2004858" y="5785772"/>
+              <a:off x="2005445" y="5785772"/>
               <a:ext cx="223753" cy="80101"/>
             </a:xfrm>
             <a:prstGeom prst="rect">
@@ -4816,7 +4807,7 @@
           </p:nvSpPr>
           <p:spPr>
             <a:xfrm>
-              <a:off x="4499764" y="5785772"/>
+              <a:off x="4497209" y="5785772"/>
               <a:ext cx="62179" cy="80101"/>
             </a:xfrm>
             <a:prstGeom prst="rect">
@@ -4862,7 +4853,7 @@
           </p:nvSpPr>
           <p:spPr>
             <a:xfrm>
-              <a:off x="6851704" y="5785772"/>
+              <a:off x="6846007" y="5785772"/>
               <a:ext cx="186537" cy="80101"/>
             </a:xfrm>
             <a:prstGeom prst="rect">
